--- a/Study/Reflexive AI - Initiative Pitch.pptx
+++ b/Study/Reflexive AI - Initiative Pitch.pptx
@@ -14532,7 +14532,29 @@
                 <a:ea typeface="Sora"/>
                 <a:cs typeface="Sora"/>
               </a:rPr>
-              <a:t>If only we could </a:t>
+              <a:t>When it comes to AI</a:t>
+            </a:r>
+            <a:r>
+              <a:rPr lang="en-US" sz="4600" b="1">
+                <a:solidFill>
+                  <a:srgbClr val="14202B"/>
+                </a:solidFill>
+                <a:latin typeface="Sora"/>
+                <a:ea typeface="Sora"/>
+                <a:cs typeface="Sora"/>
+              </a:rPr>
+              <a:t>, if </a:t>
+            </a:r>
+            <a:r>
+              <a:rPr lang="en-US" sz="4600" b="1" dirty="0">
+                <a:solidFill>
+                  <a:srgbClr val="14202B"/>
+                </a:solidFill>
+                <a:latin typeface="Sora"/>
+                <a:ea typeface="Sora"/>
+                <a:cs typeface="Sora"/>
+              </a:rPr>
+              <a:t>only we could </a:t>
             </a:r>
             <a:r>
               <a:rPr lang="en-US" sz="4600" b="1" dirty="0">
